--- a/第六次培训_含插图.pptx
+++ b/第六次培训_含插图.pptx
@@ -7502,12 +7502,20 @@
             <a:p>
               <a:pPr algn="ctr"/>
               <a:r>
+                <a:rPr lang="en-US" altLang="zh-CN">
+                  <a:solidFill>
+                    <a:schemeClr val="tx1"/>
+                  </a:solidFill>
+                </a:rPr>
+                <a:t>m+</a:t>
+              </a:r>
+              <a:r>
                 <a:rPr lang="en-US" altLang="zh-CN" dirty="0">
                   <a:solidFill>
                     <a:schemeClr val="tx1"/>
                   </a:solidFill>
                 </a:rPr>
-                <a:t>+1+2</a:t>
+                <a:t>1+2</a:t>
               </a:r>
               <a:endParaRPr lang="zh-CN" altLang="en-US" dirty="0">
                 <a:solidFill>
